--- a/assets/pptx/catalog-279.pptx
+++ b/assets/pptx/catalog-279.pptx
@@ -3291,7 +3291,7 @@
                 <a:ea typeface="Ebrima"/>
                 <a:cs typeface="Ebrima"/>
               </a:rPr>
-              <a:t>ቃል ብቻ ተናገር (4x) የአንተ ቃል ተራሮችን ዘሎ ይመጣል (3x) ቃል ብቻ ስትናገር ያልከው ይሆናል (3x)</a:t>
+              <a:t>ቃል ብቻ ተናገር 4x የአንተ ቃል ተራሮችን ዘሎ ይመጣል 3x ቃል ብቻ ስትናገር ያልከው ይሆናል 3x</a:t>
             </a:r>
           </a:p>
         </p:txBody>
@@ -3760,7 +3760,7 @@
                 <a:ea typeface="Ebrima"/>
                 <a:cs typeface="Ebrima"/>
               </a:rPr>
-              <a:t>(2x)</a:t>
+              <a:t>2x</a:t>
             </a:r>
           </a:p>
         </p:txBody>
@@ -3827,7 +3827,7 @@
                 <a:ea typeface="Ebrima"/>
                 <a:cs typeface="Ebrima"/>
               </a:rPr>
-              <a:t>ቃል ብቻ ተናገር (4x) የአንተ ቃል ተራሮችን ዘሎ ይመጣል (3x) ቃል ብቻ ስትናገር ያልከው ይሆናል (3x)</a:t>
+              <a:t>ቃል ብቻ ተናገር 4x የአንተ ቃል ተራሮችን ዘሎ ይመጣል 3x ቃል ብቻ ስትናገር ያልከው ይሆናል 3x</a:t>
             </a:r>
           </a:p>
         </p:txBody>
@@ -3961,7 +3961,7 @@
                 <a:ea typeface="Ebrima"/>
                 <a:cs typeface="Ebrima"/>
               </a:rPr>
-              <a:t>ቃል ብቻ ተናገር (4x) የአንተ ቃል ተራሮችን ዘሎ ይመጣል (3x) ቃል ብቻ ስትናገር ያልከው ይሆናል (3x)</a:t>
+              <a:t>ቃል ብቻ ተናገር 4x የአንተ ቃል ተራሮችን ዘሎ ይመጣል 3x ቃል ብቻ ስትናገር ያልከው ይሆናል 3x</a:t>
             </a:r>
           </a:p>
         </p:txBody>
@@ -4363,7 +4363,7 @@
                 <a:ea typeface="Ebrima"/>
                 <a:cs typeface="Ebrima"/>
               </a:rPr>
-              <a:t>(2x)</a:t>
+              <a:t>2x</a:t>
             </a:r>
           </a:p>
         </p:txBody>
@@ -4430,7 +4430,7 @@
                 <a:ea typeface="Ebrima"/>
                 <a:cs typeface="Ebrima"/>
               </a:rPr>
-              <a:t>ቃል ብቻ ተናገር (4x) የአንተ ቃል ተራሮችን ዘሎ ይመጣል (3x) ቃል ብቻ ስትናገር ያልከው ይሆናል (3x)</a:t>
+              <a:t>ቃል ብቻ ተናገር 4x የአንተ ቃል ተራሮችን ዘሎ ይመጣል 3x ቃል ብቻ ስትናገር ያልከው ይሆናል 3x</a:t>
             </a:r>
           </a:p>
         </p:txBody>
@@ -4966,7 +4966,7 @@
                 <a:ea typeface="Ebrima"/>
                 <a:cs typeface="Ebrima"/>
               </a:rPr>
-              <a:t>(2x)</a:t>
+              <a:t>2x</a:t>
             </a:r>
           </a:p>
         </p:txBody>
@@ -5033,7 +5033,7 @@
                 <a:ea typeface="Ebrima"/>
                 <a:cs typeface="Ebrima"/>
               </a:rPr>
-              <a:t>ቃል ብቻ ተናገር (4x) የአንተ ቃል ተራሮችን ዘሎ ይመጣል (3x) ቃል ብቻ ስትናገር ያልከው ይሆናል (3x)</a:t>
+              <a:t>ቃል ብቻ ተናገር 4x የአንተ ቃል ተራሮችን ዘሎ ይመጣል 3x ቃል ብቻ ስትናገር ያልከው ይሆናል 3x</a:t>
             </a:r>
           </a:p>
         </p:txBody>
@@ -5703,7 +5703,7 @@
                 <a:ea typeface="Ebrima"/>
                 <a:cs typeface="Ebrima"/>
               </a:rPr>
-              <a:t>(2x) ምን ተስኖት (4x) ምን ተስኖት (4x)</a:t>
+              <a:t>2x ምን ተስኖት 4x ምን ተስኖት 4x</a:t>
             </a:r>
           </a:p>
         </p:txBody>
@@ -6373,7 +6373,7 @@
                 <a:ea typeface="Ebrima"/>
                 <a:cs typeface="Ebrima"/>
               </a:rPr>
-              <a:t>(2x) ምን ተስኖት (4x) ምን ተስኖት (4x) ምን ተስኖት (4x) ምን ተስኖት (4x)</a:t>
+              <a:t>2x ምን ተስኖት 4x ምን ተስኖት 4x ምን ተስኖት 4x ምን ተስኖት 4x</a:t>
             </a:r>
           </a:p>
         </p:txBody>
@@ -6641,7 +6641,7 @@
                 <a:ea typeface="Ebrima"/>
                 <a:cs typeface="Ebrima"/>
               </a:rPr>
-              <a:t>(2x)</a:t>
+              <a:t>2x</a:t>
             </a:r>
           </a:p>
         </p:txBody>
